--- a/slides/S2_Infrastructure.pptx
+++ b/slides/S2_Infrastructure.pptx
@@ -206,7 +206,7 @@
           <a:p>
             <a:fld id="{DAA656B2-ED32-8044-9B2A-829653741135}" type="datetimeFigureOut">
               <a:rPr lang="nl-NL" smtClean="0"/>
-              <a:t>10-05-2026</a:t>
+              <a:t>11-5-2026</a:t>
             </a:fld>
             <a:endParaRPr lang="nl-NL"/>
           </a:p>
@@ -946,7 +946,7 @@
           <a:p>
             <a:fld id="{3A7CBCB4-1EFE-4E3B-9C8A-BCC4F06648F3}" type="datetimeFigureOut">
               <a:rPr lang="en-NL" smtClean="0"/>
-              <a:t>5/10/26</a:t>
+              <a:t>05/11/2026</a:t>
             </a:fld>
             <a:endParaRPr lang="en-NL"/>
           </a:p>
@@ -1146,7 +1146,7 @@
           <a:p>
             <a:fld id="{3A7CBCB4-1EFE-4E3B-9C8A-BCC4F06648F3}" type="datetimeFigureOut">
               <a:rPr lang="en-NL" smtClean="0"/>
-              <a:t>5/10/26</a:t>
+              <a:t>05/11/2026</a:t>
             </a:fld>
             <a:endParaRPr lang="en-NL"/>
           </a:p>
@@ -1356,7 +1356,7 @@
           <a:p>
             <a:fld id="{3A7CBCB4-1EFE-4E3B-9C8A-BCC4F06648F3}" type="datetimeFigureOut">
               <a:rPr lang="en-NL" smtClean="0"/>
-              <a:t>5/10/26</a:t>
+              <a:t>05/11/2026</a:t>
             </a:fld>
             <a:endParaRPr lang="en-NL"/>
           </a:p>
@@ -1556,7 +1556,7 @@
           <a:p>
             <a:fld id="{3A7CBCB4-1EFE-4E3B-9C8A-BCC4F06648F3}" type="datetimeFigureOut">
               <a:rPr lang="en-NL" smtClean="0"/>
-              <a:t>5/10/26</a:t>
+              <a:t>05/11/2026</a:t>
             </a:fld>
             <a:endParaRPr lang="en-NL"/>
           </a:p>
@@ -1832,7 +1832,7 @@
           <a:p>
             <a:fld id="{3A7CBCB4-1EFE-4E3B-9C8A-BCC4F06648F3}" type="datetimeFigureOut">
               <a:rPr lang="en-NL" smtClean="0"/>
-              <a:t>5/10/26</a:t>
+              <a:t>05/11/2026</a:t>
             </a:fld>
             <a:endParaRPr lang="en-NL"/>
           </a:p>
@@ -2100,7 +2100,7 @@
           <a:p>
             <a:fld id="{3A7CBCB4-1EFE-4E3B-9C8A-BCC4F06648F3}" type="datetimeFigureOut">
               <a:rPr lang="en-NL" smtClean="0"/>
-              <a:t>5/10/26</a:t>
+              <a:t>05/11/2026</a:t>
             </a:fld>
             <a:endParaRPr lang="en-NL"/>
           </a:p>
@@ -2515,7 +2515,7 @@
           <a:p>
             <a:fld id="{3A7CBCB4-1EFE-4E3B-9C8A-BCC4F06648F3}" type="datetimeFigureOut">
               <a:rPr lang="en-NL" smtClean="0"/>
-              <a:t>5/10/26</a:t>
+              <a:t>05/11/2026</a:t>
             </a:fld>
             <a:endParaRPr lang="en-NL"/>
           </a:p>
@@ -2657,7 +2657,7 @@
           <a:p>
             <a:fld id="{3A7CBCB4-1EFE-4E3B-9C8A-BCC4F06648F3}" type="datetimeFigureOut">
               <a:rPr lang="en-NL" smtClean="0"/>
-              <a:t>5/10/26</a:t>
+              <a:t>05/11/2026</a:t>
             </a:fld>
             <a:endParaRPr lang="en-NL"/>
           </a:p>
@@ -2770,7 +2770,7 @@
           <a:p>
             <a:fld id="{3A7CBCB4-1EFE-4E3B-9C8A-BCC4F06648F3}" type="datetimeFigureOut">
               <a:rPr lang="en-NL" smtClean="0"/>
-              <a:t>5/10/26</a:t>
+              <a:t>05/11/2026</a:t>
             </a:fld>
             <a:endParaRPr lang="en-NL"/>
           </a:p>
@@ -3083,7 +3083,7 @@
           <a:p>
             <a:fld id="{3A7CBCB4-1EFE-4E3B-9C8A-BCC4F06648F3}" type="datetimeFigureOut">
               <a:rPr lang="en-NL" smtClean="0"/>
-              <a:t>5/10/26</a:t>
+              <a:t>05/11/2026</a:t>
             </a:fld>
             <a:endParaRPr lang="en-NL"/>
           </a:p>
@@ -3372,7 +3372,7 @@
           <a:p>
             <a:fld id="{3A7CBCB4-1EFE-4E3B-9C8A-BCC4F06648F3}" type="datetimeFigureOut">
               <a:rPr lang="en-NL" smtClean="0"/>
-              <a:t>5/10/26</a:t>
+              <a:t>05/11/2026</a:t>
             </a:fld>
             <a:endParaRPr lang="en-NL"/>
           </a:p>
@@ -3615,7 +3615,7 @@
           <a:p>
             <a:fld id="{3A7CBCB4-1EFE-4E3B-9C8A-BCC4F06648F3}" type="datetimeFigureOut">
               <a:rPr lang="en-NL" smtClean="0"/>
-              <a:t>5/10/26</a:t>
+              <a:t>05/11/2026</a:t>
             </a:fld>
             <a:endParaRPr lang="en-NL"/>
           </a:p>
@@ -4320,6 +4320,45 @@
         <p:txBody>
           <a:bodyPr/>
           <a:lstStyle/>
+          <a:p>
+            <a:pPr marL="0" indent="0">
+              <a:buNone/>
+            </a:pPr>
+            <a:r>
+              <a:rPr lang="nl-NL" noProof="0" dirty="0"/>
+              <a:t>Tips:</a:t>
+            </a:r>
+          </a:p>
+          <a:p>
+            <a:r>
+              <a:rPr lang="nl-NL" dirty="0"/>
+              <a:t>Maak een eenvoudig blokdiagram. </a:t>
+            </a:r>
+          </a:p>
+          <a:p>
+            <a:r>
+              <a:rPr lang="nl-NL" dirty="0"/>
+              <a:t>Documenteer alles wat jullie gemaakt hebben in de groeps-</a:t>
+            </a:r>
+            <a:r>
+              <a:rPr lang="nl-NL" dirty="0" err="1"/>
+              <a:t>repo</a:t>
+            </a:r>
+            <a:r>
+              <a:rPr lang="nl-NL" dirty="0"/>
+              <a:t>.</a:t>
+            </a:r>
+          </a:p>
+          <a:p>
+            <a:r>
+              <a:rPr lang="nl-NL"/>
+              <a:t>Demo op dag 3</a:t>
+            </a:r>
+            <a:endParaRPr lang="nl-NL" dirty="0"/>
+          </a:p>
+          <a:p>
+            <a:endParaRPr lang="nl-NL" noProof="0" dirty="0"/>
+          </a:p>
           <a:p>
             <a:r>
               <a:rPr lang="nl-NL" noProof="0" dirty="0"/>
